--- a/docs/pptx/auc3/ritu-auc3-dose-overlay.pptx
+++ b/docs/pptx/auc3/ritu-auc3-dose-overlay.pptx
@@ -3223,8 +3223,8 @@
           </p:nvSpPr>
           <p:spPr>
             <a:xfrm>
-              <a:off x="2399088" y="4739793"/>
-              <a:ext cx="117036" cy="708257"/>
+              <a:off x="2399088" y="4975879"/>
+              <a:ext cx="117036" cy="472171"/>
             </a:xfrm>
             <a:prstGeom prst="rect">
               <a:avLst/>
@@ -4483,8 +4483,8 @@
           </p:nvSpPr>
           <p:spPr>
             <a:xfrm>
-              <a:off x="1930942" y="4739793"/>
-              <a:ext cx="117036" cy="708257"/>
+              <a:off x="1930942" y="4975879"/>
+              <a:ext cx="117036" cy="472171"/>
             </a:xfrm>
             <a:prstGeom prst="rect">
               <a:avLst/>
